--- a/site/clases/parte-2-deep-learning/139-generacion-de-texto-char-rnn/clase-139-generacion-de-texto-char-rnn-presentacion.pptx
+++ b/site/clases/parte-2-deep-learning/139-generacion-de-texto-char-rnn/clase-139-generacion-de-texto-char-rnn-presentacion.pptx
@@ -3272,7 +3272,7 @@
                 </a:solidFill>
                 <a:latin typeface="Segoe UI"/>
               </a:rPr>
-              <a:t>Parte: 2 — Deep Learning · Fuente: Géron, cap. 16 § Generating Shakespearean Text Using a Character RNN.  Duración estimada: 70 min.</a:t>
+              <a:t>Parte: 2 — Deep Learning · Fuente: Géron, cap. 16 § Generating Shakespearean Text Using a Character RNN.  Duración estimada: 70 min. · Nivel: Avanzado</a:t>
             </a:r>
           </a:p>
         </p:txBody>
@@ -3581,7 +3581,7 @@
                 </a:solidFill>
                 <a:latin typeface="Segoe UI"/>
               </a:rPr>
-              <a:t>Parte: 2 — Deep Learning · Fuente: Géron, cap. 16 § Generating Shakespearean Text Using a Character RNN.  Duración estimada: 70 min.</a:t>
+              <a:t>Parte: 2 — Deep Learning · Fuente: Géron, cap. 16 § Generating Shakespearean Text Using a Character RNN.  Duración estimada: 70 min. · Nivel: Avanzado</a:t>
             </a:r>
           </a:p>
         </p:txBody>
@@ -4888,7 +4888,216 @@
                 </a:solidFill>
                 <a:latin typeface="Courier New"/>
               </a:rPr>
-              <a:t># Imports y configuración inicial</a:t>
+              <a:t>import numpy as np</a:t>
+            </a:r>
+          </a:p>
+          <a:p>
+            <a:pPr>
+              <a:defRPr sz="1200" b="0">
+                <a:solidFill>
+                  <a:srgbClr val="F8FAFC"/>
+                </a:solidFill>
+                <a:latin typeface="Courier New"/>
+              </a:defRPr>
+            </a:pPr>
+            <a:r>
+              <a:rPr sz="1200" b="0">
+                <a:solidFill>
+                  <a:srgbClr val="F8FAFC"/>
+                </a:solidFill>
+                <a:latin typeface="Courier New"/>
+              </a:rPr>
+              <a:t>from tensorflow import keras</a:t>
+            </a:r>
+          </a:p>
+          <a:p>
+            <a:pPr>
+              <a:defRPr sz="1200" b="0">
+                <a:solidFill>
+                  <a:srgbClr val="F8FAFC"/>
+                </a:solidFill>
+                <a:latin typeface="Courier New"/>
+              </a:defRPr>
+            </a:pPr>
+            <a:r>
+              <a:rPr sz="1200" b="0">
+                <a:solidFill>
+                  <a:srgbClr val="F8FAFC"/>
+                </a:solidFill>
+                <a:latin typeface="Courier New"/>
+              </a:rPr>
+              <a:t>from tensorflow.keras import layers</a:t>
+            </a:r>
+          </a:p>
+          <a:p>
+            <a:pPr>
+              <a:defRPr sz="1200" b="0">
+                <a:solidFill>
+                  <a:srgbClr val="F8FAFC"/>
+                </a:solidFill>
+                <a:latin typeface="Courier New"/>
+              </a:defRPr>
+            </a:pPr>
+            <a:r>
+              <a:rPr sz="1200" b="0">
+                <a:solidFill>
+                  <a:srgbClr val="F8FAFC"/>
+                </a:solidFill>
+                <a:latin typeface="Courier New"/>
+              </a:rPr>
+              <a:t>keras.utils.set_random_seed(42)</a:t>
+            </a:r>
+          </a:p>
+          <a:p>
+            <a:pPr>
+              <a:defRPr sz="1200" b="0">
+                <a:solidFill>
+                  <a:srgbClr val="F8FAFC"/>
+                </a:solidFill>
+                <a:latin typeface="Courier New"/>
+              </a:defRPr>
+            </a:pPr>
+            <a:r>
+              <a:rPr sz="1200" b="0">
+                <a:solidFill>
+                  <a:srgbClr val="F8FAFC"/>
+                </a:solidFill>
+                <a:latin typeface="Courier New"/>
+              </a:rPr>
+              <a:t>texto = ("ROMEO: But soft, what light through yonder window breaks? "</a:t>
+            </a:r>
+          </a:p>
+          <a:p>
+            <a:pPr>
+              <a:defRPr sz="1200" b="0">
+                <a:solidFill>
+                  <a:srgbClr val="F8FAFC"/>
+                </a:solidFill>
+                <a:latin typeface="Courier New"/>
+              </a:defRPr>
+            </a:pPr>
+            <a:r>
+              <a:rPr sz="1200" b="0">
+                <a:solidFill>
+                  <a:srgbClr val="F8FAFC"/>
+                </a:solidFill>
+                <a:latin typeface="Courier New"/>
+              </a:rPr>
+              <a:t>         "It is the east, and Juliet is the sun. "</a:t>
+            </a:r>
+          </a:p>
+          <a:p>
+            <a:pPr>
+              <a:defRPr sz="1200" b="0">
+                <a:solidFill>
+                  <a:srgbClr val="F8FAFC"/>
+                </a:solidFill>
+                <a:latin typeface="Courier New"/>
+              </a:defRPr>
+            </a:pPr>
+            <a:r>
+              <a:rPr sz="1200" b="0">
+                <a:solidFill>
+                  <a:srgbClr val="F8FAFC"/>
+                </a:solidFill>
+                <a:latin typeface="Courier New"/>
+              </a:rPr>
+              <a:t>         "Arise fair sun and kill the envious moon. ") * 40</a:t>
+            </a:r>
+          </a:p>
+          <a:p>
+            <a:pPr>
+              <a:defRPr sz="1200" b="0">
+                <a:solidFill>
+                  <a:srgbClr val="F8FAFC"/>
+                </a:solidFill>
+                <a:latin typeface="Courier New"/>
+              </a:defRPr>
+            </a:pPr>
+            <a:r>
+              <a:rPr sz="1200" b="0">
+                <a:solidFill>
+                  <a:srgbClr val="F8FAFC"/>
+                </a:solidFill>
+                <a:latin typeface="Courier New"/>
+              </a:rPr>
+              <a:t>vocab = sorted(set(texto))</a:t>
+            </a:r>
+          </a:p>
+          <a:p>
+            <a:pPr>
+              <a:defRPr sz="1200" b="0">
+                <a:solidFill>
+                  <a:srgbClr val="F8FAFC"/>
+                </a:solidFill>
+                <a:latin typeface="Courier New"/>
+              </a:defRPr>
+            </a:pPr>
+            <a:r>
+              <a:rPr sz="1200" b="0">
+                <a:solidFill>
+                  <a:srgbClr val="F8FAFC"/>
+                </a:solidFill>
+                <a:latin typeface="Courier New"/>
+              </a:rPr>
+              <a:t>stoi = {c: i for i, c in enumerate(vocab)}      # char -&gt; int</a:t>
+            </a:r>
+          </a:p>
+          <a:p>
+            <a:pPr>
+              <a:defRPr sz="1200" b="0">
+                <a:solidFill>
+                  <a:srgbClr val="F8FAFC"/>
+                </a:solidFill>
+                <a:latin typeface="Courier New"/>
+              </a:defRPr>
+            </a:pPr>
+            <a:r>
+              <a:rPr sz="1200" b="0">
+                <a:solidFill>
+                  <a:srgbClr val="F8FAFC"/>
+                </a:solidFill>
+                <a:latin typeface="Courier New"/>
+              </a:rPr>
+              <a:t>itos = {i: c for c, i in stoi.items()}          # int -&gt; char</a:t>
+            </a:r>
+          </a:p>
+          <a:p>
+            <a:pPr>
+              <a:defRPr sz="1200" b="0">
+                <a:solidFill>
+                  <a:srgbClr val="F8FAFC"/>
+                </a:solidFill>
+                <a:latin typeface="Courier New"/>
+              </a:defRPr>
+            </a:pPr>
+            <a:r>
+              <a:rPr sz="1200" b="0">
+                <a:solidFill>
+                  <a:srgbClr val="F8FAFC"/>
+                </a:solidFill>
+                <a:latin typeface="Courier New"/>
+              </a:rPr>
+              <a:t>vocab_size = len(vocab)</a:t>
+            </a:r>
+          </a:p>
+          <a:p>
+            <a:pPr>
+              <a:defRPr sz="1200" b="0">
+                <a:solidFill>
+                  <a:srgbClr val="F8FAFC"/>
+                </a:solidFill>
+                <a:latin typeface="Courier New"/>
+              </a:defRPr>
+            </a:pPr>
+            <a:r>
+              <a:rPr sz="1200" b="0">
+                <a:solidFill>
+                  <a:srgbClr val="F8FAFC"/>
+                </a:solidFill>
+                <a:latin typeface="Courier New"/>
+              </a:rPr>
+              <a:t>print("longitud corpus:", len(texto), "| vocab_size:", vocab_size)</a:t>
             </a:r>
           </a:p>
         </p:txBody>
